--- a/retemplated/Are-You-Ready-for-Every-Conversation-at-TechIQ-IQVIA.pptx
+++ b/retemplated/Are-You-Ready-for-Every-Conversation-at-TechIQ-IQVIA.pptx
@@ -34231,6 +34231,7 @@
           <a:lstStyle/>
           <a:p>
             <a:r>
+              <a:rPr/>
               <a:t>Build a Quantified Value Proposition</a:t>
             </a:r>
           </a:p>
@@ -34239,7 +34240,13 @@
               <a:rPr sz="1400" b="0"/>
               <a:t>Generic pitches lose. Numbers win.
 Open the IQVIA UVP Calculator and build a one-sentence value proposition using your prospect's own numbers for revenue uplift, cost savings and risk reduction.
-Try: https://esource-course-developer.vercel.app/uvp-calculator.html</a:t>
+Try: </a:t>
+            </a:r>
+            <a:r>
+              <a:rPr sz="1400" b="0">
+                <a:hlinkClick r:id="rId3"/>
+              </a:rPr>
+              <a:t>https://esource-course-developer.vercel.app/uvp-calculator.html</a:t>
             </a:r>
           </a:p>
         </p:txBody>
@@ -36365,6 +36372,7 @@
           <a:lstStyle/>
           <a:p>
             <a:r>
+              <a:rPr/>
               <a:t>You Are Ready — Here Is Your One Next Step</a:t>
             </a:r>
           </a:p>
@@ -36374,7 +36382,13 @@
               <a:t>Thank you for completing Introduction to CTFS for TechIQ.
 Before your first conversation at the conference: open the UVP Calculator, pick one prospect you expect to meet, and build their value proposition now.
 Walk in with the number ready — not the idea.
-Open the UVP Calculator</a:t>
+</a:t>
+            </a:r>
+            <a:r>
+              <a:rPr sz="1400" b="0">
+                <a:hlinkClick r:id="rId3"/>
+              </a:rPr>
+              <a:t>Open the UVP Calculator</a:t>
             </a:r>
           </a:p>
         </p:txBody>
@@ -37174,6 +37188,7 @@
           <a:lstStyle/>
           <a:p>
             <a:r>
+              <a:rPr/>
               <a:t>Watch Before We Go Deeper</a:t>
             </a:r>
           </a:p>
@@ -37186,7 +37201,13 @@
             <a:r>
               <a:rPr sz="1400" b="0"/>
               <a:t>• Two minutes. Frames the whole suite visually.
-Watch: https://vimeo.com/1211116806/987aa02555</a:t>
+Watch: </a:t>
+            </a:r>
+            <a:r>
+              <a:rPr sz="1400" b="0">
+                <a:hlinkClick r:id="rId2"/>
+              </a:rPr>
+              <a:t>https://vimeo.com/1211116806/987aa02555</a:t>
             </a:r>
           </a:p>
         </p:txBody>
@@ -37207,6 +37228,7 @@
           <a:lstStyle/>
           <a:p>
             <a:r>
+              <a:rPr/>
               <a:t>TAKEAWAY</a:t>
             </a:r>
           </a:p>
